--- a/deep_learning/2_CNN/4_transfer_learning/transfer_learning.pptx
+++ b/deep_learning/2_CNN/4_transfer_learning/transfer_learning.pptx
@@ -222,7 +222,7 @@
           <a:p>
             <a:fld id="{7BAEECA8-D063-486F-AE31-5020270C1449}" type="datetimeFigureOut">
               <a:rPr lang="en-US" smtClean="0"/>
-              <a:t>4/5/2026</a:t>
+              <a:t>4/11/2026</a:t>
             </a:fld>
             <a:endParaRPr lang="en-US"/>
           </a:p>
@@ -399,7 +399,7 @@
           <a:p>
             <a:fld id="{CB233BD1-3BA8-448D-9D08-7846095EA517}" type="datetimeFigureOut">
               <a:rPr lang="en-US" smtClean="0"/>
-              <a:t>4/5/2026</a:t>
+              <a:t>4/11/2026</a:t>
             </a:fld>
             <a:endParaRPr lang="en-US"/>
           </a:p>
@@ -813,7 +813,7 @@
           <a:p>
             <a:fld id="{6383FAE1-13DE-4511-8C1B-C8AFB720664C}" type="datetimeFigureOut">
               <a:rPr lang="en-US" smtClean="0"/>
-              <a:t>4/5/2026</a:t>
+              <a:t>4/11/2026</a:t>
             </a:fld>
             <a:endParaRPr lang="en-US"/>
           </a:p>
@@ -1011,7 +1011,7 @@
           <a:p>
             <a:fld id="{6383FAE1-13DE-4511-8C1B-C8AFB720664C}" type="datetimeFigureOut">
               <a:rPr lang="en-US" smtClean="0"/>
-              <a:t>4/5/2026</a:t>
+              <a:t>4/11/2026</a:t>
             </a:fld>
             <a:endParaRPr lang="en-US"/>
           </a:p>
@@ -1219,7 +1219,7 @@
           <a:p>
             <a:fld id="{6383FAE1-13DE-4511-8C1B-C8AFB720664C}" type="datetimeFigureOut">
               <a:rPr lang="en-US" smtClean="0"/>
-              <a:t>4/5/2026</a:t>
+              <a:t>4/11/2026</a:t>
             </a:fld>
             <a:endParaRPr lang="en-US"/>
           </a:p>
@@ -1417,7 +1417,7 @@
           <a:p>
             <a:fld id="{6383FAE1-13DE-4511-8C1B-C8AFB720664C}" type="datetimeFigureOut">
               <a:rPr lang="en-US" smtClean="0"/>
-              <a:t>4/5/2026</a:t>
+              <a:t>4/11/2026</a:t>
             </a:fld>
             <a:endParaRPr lang="en-US"/>
           </a:p>
@@ -1692,7 +1692,7 @@
           <a:p>
             <a:fld id="{6383FAE1-13DE-4511-8C1B-C8AFB720664C}" type="datetimeFigureOut">
               <a:rPr lang="en-US" smtClean="0"/>
-              <a:t>4/5/2026</a:t>
+              <a:t>4/11/2026</a:t>
             </a:fld>
             <a:endParaRPr lang="en-US"/>
           </a:p>
@@ -1957,7 +1957,7 @@
           <a:p>
             <a:fld id="{6383FAE1-13DE-4511-8C1B-C8AFB720664C}" type="datetimeFigureOut">
               <a:rPr lang="en-US" smtClean="0"/>
-              <a:t>4/5/2026</a:t>
+              <a:t>4/11/2026</a:t>
             </a:fld>
             <a:endParaRPr lang="en-US"/>
           </a:p>
@@ -2369,7 +2369,7 @@
           <a:p>
             <a:fld id="{6383FAE1-13DE-4511-8C1B-C8AFB720664C}" type="datetimeFigureOut">
               <a:rPr lang="en-US" smtClean="0"/>
-              <a:t>4/5/2026</a:t>
+              <a:t>4/11/2026</a:t>
             </a:fld>
             <a:endParaRPr lang="en-US"/>
           </a:p>
@@ -2510,7 +2510,7 @@
           <a:p>
             <a:fld id="{6383FAE1-13DE-4511-8C1B-C8AFB720664C}" type="datetimeFigureOut">
               <a:rPr lang="en-US" smtClean="0"/>
-              <a:t>4/5/2026</a:t>
+              <a:t>4/11/2026</a:t>
             </a:fld>
             <a:endParaRPr lang="en-US"/>
           </a:p>
@@ -2623,7 +2623,7 @@
           <a:p>
             <a:fld id="{6383FAE1-13DE-4511-8C1B-C8AFB720664C}" type="datetimeFigureOut">
               <a:rPr lang="en-US" smtClean="0"/>
-              <a:t>4/5/2026</a:t>
+              <a:t>4/11/2026</a:t>
             </a:fld>
             <a:endParaRPr lang="en-US"/>
           </a:p>
@@ -2934,7 +2934,7 @@
           <a:p>
             <a:fld id="{6383FAE1-13DE-4511-8C1B-C8AFB720664C}" type="datetimeFigureOut">
               <a:rPr lang="en-US" smtClean="0"/>
-              <a:t>4/5/2026</a:t>
+              <a:t>4/11/2026</a:t>
             </a:fld>
             <a:endParaRPr lang="en-US"/>
           </a:p>
@@ -3225,7 +3225,7 @@
           <a:p>
             <a:fld id="{6383FAE1-13DE-4511-8C1B-C8AFB720664C}" type="datetimeFigureOut">
               <a:rPr lang="en-US" smtClean="0"/>
-              <a:t>4/5/2026</a:t>
+              <a:t>4/11/2026</a:t>
             </a:fld>
             <a:endParaRPr lang="en-US"/>
           </a:p>
@@ -3469,7 +3469,7 @@
           <a:p>
             <a:fld id="{6383FAE1-13DE-4511-8C1B-C8AFB720664C}" type="datetimeFigureOut">
               <a:rPr lang="en-US" smtClean="0"/>
-              <a:t>4/5/2026</a:t>
+              <a:t>4/11/2026</a:t>
             </a:fld>
             <a:endParaRPr lang="en-US"/>
           </a:p>
@@ -4056,10 +4056,9 @@
           </a:bodyPr>
           <a:lstStyle/>
           <a:p>
-            <a:pPr algn="ctr"/>
             <a:r>
               <a:rPr lang="en-US" b="1" dirty="0"/>
-              <a:t>XXX</a:t>
+              <a:t>Transfer Learning</a:t>
             </a:r>
             <a:endParaRPr lang="en-US" dirty="0"/>
           </a:p>

--- a/deep_learning/2_CNN/4_transfer_learning/transfer_learning.pptx
+++ b/deep_learning/2_CNN/4_transfer_learning/transfer_learning.pptx
@@ -222,7 +222,7 @@
           <a:p>
             <a:fld id="{7BAEECA8-D063-486F-AE31-5020270C1449}" type="datetimeFigureOut">
               <a:rPr lang="en-US" smtClean="0"/>
-              <a:t>4/11/2026</a:t>
+              <a:t>5/9/2026</a:t>
             </a:fld>
             <a:endParaRPr lang="en-US"/>
           </a:p>
@@ -399,7 +399,7 @@
           <a:p>
             <a:fld id="{CB233BD1-3BA8-448D-9D08-7846095EA517}" type="datetimeFigureOut">
               <a:rPr lang="en-US" smtClean="0"/>
-              <a:t>4/11/2026</a:t>
+              <a:t>5/9/2026</a:t>
             </a:fld>
             <a:endParaRPr lang="en-US"/>
           </a:p>
@@ -813,7 +813,7 @@
           <a:p>
             <a:fld id="{6383FAE1-13DE-4511-8C1B-C8AFB720664C}" type="datetimeFigureOut">
               <a:rPr lang="en-US" smtClean="0"/>
-              <a:t>4/11/2026</a:t>
+              <a:t>5/9/2026</a:t>
             </a:fld>
             <a:endParaRPr lang="en-US"/>
           </a:p>
@@ -1011,7 +1011,7 @@
           <a:p>
             <a:fld id="{6383FAE1-13DE-4511-8C1B-C8AFB720664C}" type="datetimeFigureOut">
               <a:rPr lang="en-US" smtClean="0"/>
-              <a:t>4/11/2026</a:t>
+              <a:t>5/9/2026</a:t>
             </a:fld>
             <a:endParaRPr lang="en-US"/>
           </a:p>
@@ -1219,7 +1219,7 @@
           <a:p>
             <a:fld id="{6383FAE1-13DE-4511-8C1B-C8AFB720664C}" type="datetimeFigureOut">
               <a:rPr lang="en-US" smtClean="0"/>
-              <a:t>4/11/2026</a:t>
+              <a:t>5/9/2026</a:t>
             </a:fld>
             <a:endParaRPr lang="en-US"/>
           </a:p>
@@ -1417,7 +1417,7 @@
           <a:p>
             <a:fld id="{6383FAE1-13DE-4511-8C1B-C8AFB720664C}" type="datetimeFigureOut">
               <a:rPr lang="en-US" smtClean="0"/>
-              <a:t>4/11/2026</a:t>
+              <a:t>5/9/2026</a:t>
             </a:fld>
             <a:endParaRPr lang="en-US"/>
           </a:p>
@@ -1692,7 +1692,7 @@
           <a:p>
             <a:fld id="{6383FAE1-13DE-4511-8C1B-C8AFB720664C}" type="datetimeFigureOut">
               <a:rPr lang="en-US" smtClean="0"/>
-              <a:t>4/11/2026</a:t>
+              <a:t>5/9/2026</a:t>
             </a:fld>
             <a:endParaRPr lang="en-US"/>
           </a:p>
@@ -1957,7 +1957,7 @@
           <a:p>
             <a:fld id="{6383FAE1-13DE-4511-8C1B-C8AFB720664C}" type="datetimeFigureOut">
               <a:rPr lang="en-US" smtClean="0"/>
-              <a:t>4/11/2026</a:t>
+              <a:t>5/9/2026</a:t>
             </a:fld>
             <a:endParaRPr lang="en-US"/>
           </a:p>
@@ -2369,7 +2369,7 @@
           <a:p>
             <a:fld id="{6383FAE1-13DE-4511-8C1B-C8AFB720664C}" type="datetimeFigureOut">
               <a:rPr lang="en-US" smtClean="0"/>
-              <a:t>4/11/2026</a:t>
+              <a:t>5/9/2026</a:t>
             </a:fld>
             <a:endParaRPr lang="en-US"/>
           </a:p>
@@ -2510,7 +2510,7 @@
           <a:p>
             <a:fld id="{6383FAE1-13DE-4511-8C1B-C8AFB720664C}" type="datetimeFigureOut">
               <a:rPr lang="en-US" smtClean="0"/>
-              <a:t>4/11/2026</a:t>
+              <a:t>5/9/2026</a:t>
             </a:fld>
             <a:endParaRPr lang="en-US"/>
           </a:p>
@@ -2623,7 +2623,7 @@
           <a:p>
             <a:fld id="{6383FAE1-13DE-4511-8C1B-C8AFB720664C}" type="datetimeFigureOut">
               <a:rPr lang="en-US" smtClean="0"/>
-              <a:t>4/11/2026</a:t>
+              <a:t>5/9/2026</a:t>
             </a:fld>
             <a:endParaRPr lang="en-US"/>
           </a:p>
@@ -2934,7 +2934,7 @@
           <a:p>
             <a:fld id="{6383FAE1-13DE-4511-8C1B-C8AFB720664C}" type="datetimeFigureOut">
               <a:rPr lang="en-US" smtClean="0"/>
-              <a:t>4/11/2026</a:t>
+              <a:t>5/9/2026</a:t>
             </a:fld>
             <a:endParaRPr lang="en-US"/>
           </a:p>
@@ -3225,7 +3225,7 @@
           <a:p>
             <a:fld id="{6383FAE1-13DE-4511-8C1B-C8AFB720664C}" type="datetimeFigureOut">
               <a:rPr lang="en-US" smtClean="0"/>
-              <a:t>4/11/2026</a:t>
+              <a:t>5/9/2026</a:t>
             </a:fld>
             <a:endParaRPr lang="en-US"/>
           </a:p>
@@ -3469,7 +3469,7 @@
           <a:p>
             <a:fld id="{6383FAE1-13DE-4511-8C1B-C8AFB720664C}" type="datetimeFigureOut">
               <a:rPr lang="en-US" smtClean="0"/>
-              <a:t>4/11/2026</a:t>
+              <a:t>5/9/2026</a:t>
             </a:fld>
             <a:endParaRPr lang="en-US"/>
           </a:p>
@@ -4046,8 +4046,8 @@
         </p:nvSpPr>
         <p:spPr>
           <a:xfrm>
-            <a:off x="255639" y="666589"/>
-            <a:ext cx="11700387" cy="4041648"/>
+            <a:off x="2084832" y="1463039"/>
+            <a:ext cx="8174736" cy="922621"/>
           </a:xfrm>
         </p:spPr>
         <p:txBody>
@@ -4637,8 +4637,8 @@
         </p:nvSpPr>
         <p:spPr>
           <a:xfrm>
-            <a:off x="383458" y="128295"/>
-            <a:ext cx="10028903" cy="4154984"/>
+            <a:off x="383459" y="128295"/>
+            <a:ext cx="5944190" cy="2308324"/>
           </a:xfrm>
           <a:prstGeom prst="rect">
             <a:avLst/>
@@ -4683,7 +4683,7 @@
                   </a:schemeClr>
                 </a:solidFill>
               </a:rPr>
-              <a:t>✅ 1. Feature Extraction</a:t>
+              <a:t>✅ A. Feature Extraction</a:t>
             </a:r>
           </a:p>
           <a:p>
@@ -4733,16 +4733,35 @@
               <a:t>👉 Fast + needs less data</a:t>
             </a:r>
           </a:p>
-          <a:p>
-            <a:endParaRPr lang="en-US" sz="2400" dirty="0">
-              <a:solidFill>
-                <a:schemeClr val="accent6">
-                  <a:lumMod val="60000"/>
-                  <a:lumOff val="40000"/>
-                </a:schemeClr>
-              </a:solidFill>
-            </a:endParaRPr>
-          </a:p>
+        </p:txBody>
+      </p:sp>
+      <p:sp>
+        <p:nvSpPr>
+          <p:cNvPr id="3" name="TextBox 2">
+            <a:extLst>
+              <a:ext uri="{FF2B5EF4-FFF2-40B4-BE49-F238E27FC236}">
+                <a16:creationId xmlns:a16="http://schemas.microsoft.com/office/drawing/2014/main" id="{4D4419FB-9274-685A-9D1C-38713E3805ED}"/>
+              </a:ext>
+            </a:extLst>
+          </p:cNvPr>
+          <p:cNvSpPr txBox="1"/>
+          <p:nvPr/>
+        </p:nvSpPr>
+        <p:spPr>
+          <a:xfrm>
+            <a:off x="6394704" y="866959"/>
+            <a:ext cx="5126736" cy="1569660"/>
+          </a:xfrm>
+          <a:prstGeom prst="rect">
+            <a:avLst/>
+          </a:prstGeom>
+          <a:noFill/>
+        </p:spPr>
+        <p:txBody>
+          <a:bodyPr wrap="square">
+            <a:spAutoFit/>
+          </a:bodyPr>
+          <a:lstStyle/>
           <a:p>
             <a:r>
               <a:rPr lang="en-US" sz="2400" b="1" dirty="0">
@@ -4753,7 +4772,7 @@
                   </a:schemeClr>
                 </a:solidFill>
               </a:rPr>
-              <a:t>✅ 2. Fine-Tuning</a:t>
+              <a:t>✅ B. Fine-Tuning</a:t>
             </a:r>
           </a:p>
           <a:p>
@@ -4856,7 +4875,7 @@
         <p:spPr>
           <a:xfrm>
             <a:off x="383458" y="128295"/>
-            <a:ext cx="10028903" cy="2677656"/>
+            <a:ext cx="10028903" cy="3046988"/>
           </a:xfrm>
           <a:prstGeom prst="rect">
             <a:avLst/>
@@ -4892,6 +4911,9 @@
             </a:endParaRPr>
           </a:p>
           <a:p>
+            <a:pPr marL="457200" indent="-457200">
+              <a:buAutoNum type="arabicPeriod"/>
+            </a:pPr>
             <a:r>
               <a:rPr lang="en-US" sz="2400" dirty="0">
                 <a:solidFill>
@@ -4901,7 +4923,20 @@
                   </a:schemeClr>
                 </a:solidFill>
               </a:rPr>
-              <a:t>1. Load pretrained model</a:t>
+              <a:t>Load pretrained model: </a:t>
+            </a:r>
+          </a:p>
+          <a:p>
+            <a:r>
+              <a:rPr lang="en-US" sz="2400" dirty="0">
+                <a:solidFill>
+                  <a:schemeClr val="accent6">
+                    <a:lumMod val="60000"/>
+                    <a:lumOff val="40000"/>
+                  </a:schemeClr>
+                </a:solidFill>
+              </a:rPr>
+              <a:t>Start with a model already trained on a large dataset for a specific task. </a:t>
             </a:r>
           </a:p>
           <a:p>
